--- a/assets/powerpoints/module-urgence/C3-dire-a-qui-c-est.pptx
+++ b/assets/powerpoints/module-urgence/C3-dire-a-qui-c-est.pptx
@@ -13247,7 +13247,7 @@
                 </a:solidFill>
                 <a:latin typeface="Verdana"/>
               </a:rPr>
-              <a:t>EN APPRENDRE PLUS</a:t>
+              <a:t>OUVRIR LA MINI-LEÇON</a:t>
             </a:r>
           </a:p>
         </p:txBody>
